--- a/week-3/CCA-F_Module3_Claude_Code_Config_Workflows.pptx
+++ b/week-3/CCA-F_Module3_Claude_Code_Config_Workflows.pptx
@@ -329,7 +329,7 @@
           <a:p>
             <a:fld id="{5BCAD085-E8A6-8845-BD4E-CB4CCA059FC4}" type="datetimeFigureOut">
               <a:rPr lang="en-US" smtClean="0"/>
-              <a:t>7/7/26</a:t>
+              <a:t>7/9/26</a:t>
             </a:fld>
             <a:endParaRPr lang="en-US"/>
           </a:p>
@@ -497,7 +497,7 @@
           <a:p>
             <a:fld id="{5BCAD085-E8A6-8845-BD4E-CB4CCA059FC4}" type="datetimeFigureOut">
               <a:rPr lang="en-US" smtClean="0"/>
-              <a:t>7/7/26</a:t>
+              <a:t>7/9/26</a:t>
             </a:fld>
             <a:endParaRPr lang="en-US"/>
           </a:p>
@@ -675,7 +675,7 @@
           <a:p>
             <a:fld id="{5BCAD085-E8A6-8845-BD4E-CB4CCA059FC4}" type="datetimeFigureOut">
               <a:rPr lang="en-US" smtClean="0"/>
-              <a:t>7/7/26</a:t>
+              <a:t>7/9/26</a:t>
             </a:fld>
             <a:endParaRPr lang="en-US"/>
           </a:p>
@@ -843,7 +843,7 @@
           <a:p>
             <a:fld id="{5BCAD085-E8A6-8845-BD4E-CB4CCA059FC4}" type="datetimeFigureOut">
               <a:rPr lang="en-US" smtClean="0"/>
-              <a:t>7/7/26</a:t>
+              <a:t>7/9/26</a:t>
             </a:fld>
             <a:endParaRPr lang="en-US"/>
           </a:p>
@@ -1088,7 +1088,7 @@
           <a:p>
             <a:fld id="{5BCAD085-E8A6-8845-BD4E-CB4CCA059FC4}" type="datetimeFigureOut">
               <a:rPr lang="en-US" smtClean="0"/>
-              <a:t>7/7/26</a:t>
+              <a:t>7/9/26</a:t>
             </a:fld>
             <a:endParaRPr lang="en-US"/>
           </a:p>
@@ -1373,7 +1373,7 @@
           <a:p>
             <a:fld id="{5BCAD085-E8A6-8845-BD4E-CB4CCA059FC4}" type="datetimeFigureOut">
               <a:rPr lang="en-US" smtClean="0"/>
-              <a:t>7/7/26</a:t>
+              <a:t>7/9/26</a:t>
             </a:fld>
             <a:endParaRPr lang="en-US"/>
           </a:p>
@@ -1792,7 +1792,7 @@
           <a:p>
             <a:fld id="{5BCAD085-E8A6-8845-BD4E-CB4CCA059FC4}" type="datetimeFigureOut">
               <a:rPr lang="en-US" smtClean="0"/>
-              <a:t>7/7/26</a:t>
+              <a:t>7/9/26</a:t>
             </a:fld>
             <a:endParaRPr lang="en-US"/>
           </a:p>
@@ -1909,7 +1909,7 @@
           <a:p>
             <a:fld id="{5BCAD085-E8A6-8845-BD4E-CB4CCA059FC4}" type="datetimeFigureOut">
               <a:rPr lang="en-US" smtClean="0"/>
-              <a:t>7/7/26</a:t>
+              <a:t>7/9/26</a:t>
             </a:fld>
             <a:endParaRPr lang="en-US"/>
           </a:p>
@@ -2004,7 +2004,7 @@
           <a:p>
             <a:fld id="{5BCAD085-E8A6-8845-BD4E-CB4CCA059FC4}" type="datetimeFigureOut">
               <a:rPr lang="en-US" smtClean="0"/>
-              <a:t>7/7/26</a:t>
+              <a:t>7/9/26</a:t>
             </a:fld>
             <a:endParaRPr lang="en-US"/>
           </a:p>
@@ -2279,7 +2279,7 @@
           <a:p>
             <a:fld id="{5BCAD085-E8A6-8845-BD4E-CB4CCA059FC4}" type="datetimeFigureOut">
               <a:rPr lang="en-US" smtClean="0"/>
-              <a:t>7/7/26</a:t>
+              <a:t>7/9/26</a:t>
             </a:fld>
             <a:endParaRPr lang="en-US"/>
           </a:p>
@@ -2531,7 +2531,7 @@
           <a:p>
             <a:fld id="{5BCAD085-E8A6-8845-BD4E-CB4CCA059FC4}" type="datetimeFigureOut">
               <a:rPr lang="en-US" smtClean="0"/>
-              <a:t>7/7/26</a:t>
+              <a:t>7/9/26</a:t>
             </a:fld>
             <a:endParaRPr lang="en-US"/>
           </a:p>
@@ -2742,7 +2742,7 @@
           <a:p>
             <a:fld id="{5BCAD085-E8A6-8845-BD4E-CB4CCA059FC4}" type="datetimeFigureOut">
               <a:rPr lang="en-US" smtClean="0"/>
-              <a:t>7/7/26</a:t>
+              <a:t>7/9/26</a:t>
             </a:fld>
             <a:endParaRPr lang="en-US"/>
           </a:p>
@@ -3893,7 +3893,7 @@
         <p:spPr>
           <a:xfrm>
             <a:off x="822960" y="1828800"/>
-            <a:ext cx="4846320" cy="3931920"/>
+            <a:ext cx="4846320" cy="3760004"/>
           </a:xfrm>
           <a:prstGeom prst="rect">
             <a:avLst/>
@@ -3918,8 +3918,22 @@
               </a:defRPr>
             </a:pPr>
             <a:r>
-              <a:t># .claude/skills/generate-docs/SKILL.md</a:t>
-            </a:r>
+              <a:rPr sz="1200" dirty="0"/>
+              <a:t># .</a:t>
+            </a:r>
+            <a:r>
+              <a:rPr sz="1200" dirty="0" err="1"/>
+              <a:t>claude</a:t>
+            </a:r>
+            <a:r>
+              <a:rPr sz="1200" dirty="0"/>
+              <a:t>/skills/generate-docs/</a:t>
+            </a:r>
+            <a:r>
+              <a:rPr sz="1200" dirty="0" err="1"/>
+              <a:t>SKILL.md</a:t>
+            </a:r>
+            <a:endParaRPr sz="1200" dirty="0"/>
           </a:p>
           <a:p>
             <a:pPr>
@@ -3933,7 +3947,10 @@
                 <a:latin typeface="Courier New"/>
               </a:defRPr>
             </a:pPr>
-            <a:endParaRPr/>
+            <a:r>
+              <a:rPr sz="1200" dirty="0"/>
+              <a:t>---</a:t>
+            </a:r>
           </a:p>
           <a:p>
             <a:pPr>
@@ -3942,13 +3959,14 @@
               </a:spcAft>
               <a:defRPr sz="1300" b="0">
                 <a:solidFill>
-                  <a:srgbClr val="FFFFFF"/>
+                  <a:srgbClr val="F0C674"/>
                 </a:solidFill>
                 <a:latin typeface="Courier New"/>
               </a:defRPr>
             </a:pPr>
             <a:r>
-              <a:t>---</a:t>
+              <a:rPr sz="1200" dirty="0"/>
+              <a:t>name: generate-docs</a:t>
             </a:r>
           </a:p>
           <a:p>
@@ -3964,7 +3982,8 @@
               </a:defRPr>
             </a:pPr>
             <a:r>
-              <a:t>name: generate-docs</a:t>
+              <a:rPr sz="1200" dirty="0"/>
+              <a:t>description: Generate API documentation</a:t>
             </a:r>
           </a:p>
           <a:p>
@@ -3974,13 +3993,14 @@
               </a:spcAft>
               <a:defRPr sz="1300" b="0">
                 <a:solidFill>
-                  <a:srgbClr val="F0C674"/>
+                  <a:srgbClr val="3498DB"/>
                 </a:solidFill>
                 <a:latin typeface="Courier New"/>
               </a:defRPr>
             </a:pPr>
             <a:r>
-              <a:t>description: Generate API documentation</a:t>
+              <a:rPr sz="1200" dirty="0"/>
+              <a:t>context: fork</a:t>
             </a:r>
           </a:p>
           <a:p>
@@ -3990,13 +4010,14 @@
               </a:spcAft>
               <a:defRPr sz="1300" b="0">
                 <a:solidFill>
-                  <a:srgbClr val="3498DB"/>
+                  <a:srgbClr val="E67E22"/>
                 </a:solidFill>
                 <a:latin typeface="Courier New"/>
               </a:defRPr>
             </a:pPr>
             <a:r>
-              <a:t>context: fork</a:t>
+              <a:rPr sz="1200" dirty="0"/>
+              <a:t>allowed-tools:</a:t>
             </a:r>
           </a:p>
           <a:p>
@@ -4012,7 +4033,8 @@
               </a:defRPr>
             </a:pPr>
             <a:r>
-              <a:t>allowed-tools:</a:t>
+              <a:rPr sz="1200" dirty="0"/>
+              <a:t>  - Read</a:t>
             </a:r>
           </a:p>
           <a:p>
@@ -4028,7 +4050,8 @@
               </a:defRPr>
             </a:pPr>
             <a:r>
-              <a:t>  - Read</a:t>
+              <a:rPr sz="1200" dirty="0"/>
+              <a:t>  - Write</a:t>
             </a:r>
           </a:p>
           <a:p>
@@ -4044,7 +4067,8 @@
               </a:defRPr>
             </a:pPr>
             <a:r>
-              <a:t>  - Write</a:t>
+              <a:rPr sz="1200" dirty="0"/>
+              <a:t>  - Glob</a:t>
             </a:r>
           </a:p>
           <a:p>
@@ -4054,13 +4078,14 @@
               </a:spcAft>
               <a:defRPr sz="1300" b="0">
                 <a:solidFill>
-                  <a:srgbClr val="E67E22"/>
+                  <a:srgbClr val="FFFFFF"/>
                 </a:solidFill>
                 <a:latin typeface="Courier New"/>
               </a:defRPr>
             </a:pPr>
             <a:r>
-              <a:t>  - Glob</a:t>
+              <a:rPr sz="1200" dirty="0"/>
+              <a:t>---</a:t>
             </a:r>
           </a:p>
           <a:p>
@@ -4075,9 +4100,7 @@
                 <a:latin typeface="Courier New"/>
               </a:defRPr>
             </a:pPr>
-            <a:r>
-              <a:t>---</a:t>
-            </a:r>
+            <a:endParaRPr sz="1200" dirty="0"/>
           </a:p>
           <a:p>
             <a:pPr>
@@ -4091,7 +4114,26 @@
                 <a:latin typeface="Courier New"/>
               </a:defRPr>
             </a:pPr>
-            <a:endParaRPr/>
+            <a:r>
+              <a:rPr sz="1200" dirty="0"/>
+              <a:t>Scan all API route files in </a:t>
+            </a:r>
+            <a:r>
+              <a:rPr sz="1200" dirty="0" err="1"/>
+              <a:t>src</a:t>
+            </a:r>
+            <a:r>
+              <a:rPr sz="1200" dirty="0"/>
+              <a:t>/</a:t>
+            </a:r>
+            <a:r>
+              <a:rPr sz="1200" dirty="0" err="1"/>
+              <a:t>api</a:t>
+            </a:r>
+            <a:r>
+              <a:rPr sz="1200" dirty="0"/>
+              <a:t>/</a:t>
+            </a:r>
           </a:p>
           <a:p>
             <a:pPr>
@@ -4106,7 +4148,16 @@
               </a:defRPr>
             </a:pPr>
             <a:r>
-              <a:t>Scan all API route files in src/api/</a:t>
+              <a:rPr sz="1200" dirty="0"/>
+              <a:t>and generate </a:t>
+            </a:r>
+            <a:r>
+              <a:rPr sz="1200" dirty="0" err="1"/>
+              <a:t>OpenAPI</a:t>
+            </a:r>
+            <a:r>
+              <a:rPr sz="1200" dirty="0"/>
+              <a:t> documentation.</a:t>
             </a:r>
           </a:p>
           <a:p>
@@ -4122,7 +4173,8 @@
               </a:defRPr>
             </a:pPr>
             <a:r>
-              <a:t>and generate OpenAPI documentation.</a:t>
+              <a:rPr sz="1200" dirty="0"/>
+              <a:t>Include request/response examples.</a:t>
             </a:r>
           </a:p>
           <a:p>
@@ -4138,24 +4190,14 @@
               </a:defRPr>
             </a:pPr>
             <a:r>
-              <a:t>Include request/response examples.</a:t>
-            </a:r>
-          </a:p>
-          <a:p>
-            <a:pPr>
-              <a:spcAft>
-                <a:spcPts val="520"/>
-              </a:spcAft>
-              <a:defRPr sz="1300" b="0">
-                <a:solidFill>
-                  <a:srgbClr val="FFFFFF"/>
-                </a:solidFill>
-                <a:latin typeface="Courier New"/>
-              </a:defRPr>
-            </a:pPr>
-            <a:r>
-              <a:t>Output to docs/api-reference.md</a:t>
-            </a:r>
+              <a:rPr sz="1200" dirty="0"/>
+              <a:t>Output to docs/</a:t>
+            </a:r>
+            <a:r>
+              <a:rPr sz="1200" dirty="0" err="1"/>
+              <a:t>api-reference.md</a:t>
+            </a:r>
+            <a:endParaRPr sz="1200" dirty="0"/>
           </a:p>
         </p:txBody>
       </p:sp>
@@ -4300,7 +4342,7 @@
         </p:nvSpPr>
         <p:spPr>
           <a:xfrm>
-            <a:off x="6583680" y="3657600"/>
+            <a:off x="6583680" y="3471484"/>
             <a:ext cx="2286000" cy="365760"/>
           </a:xfrm>
           <a:prstGeom prst="roundRect">
@@ -4340,6 +4382,7 @@
               </a:defRPr>
             </a:pPr>
             <a:r>
+              <a:rPr dirty="0"/>
               <a:t>allowed-tools</a:t>
             </a:r>
           </a:p>
@@ -4353,7 +4396,7 @@
         </p:nvSpPr>
         <p:spPr>
           <a:xfrm>
-            <a:off x="6583680" y="4114800"/>
+            <a:off x="6583680" y="3928684"/>
             <a:ext cx="5029200" cy="822960"/>
           </a:xfrm>
           <a:prstGeom prst="rect">
@@ -4376,14 +4419,21 @@
               </a:defRPr>
             </a:pPr>
             <a:r>
+              <a:rPr dirty="0"/>
               <a:t>Restricts which tools the skill</a:t>
             </a:r>
-            <a:br/>
-            <a:r>
+            <a:br>
+              <a:rPr dirty="0"/>
+            </a:br>
+            <a:r>
+              <a:rPr dirty="0"/>
               <a:t>can use. Principle of least privilege</a:t>
             </a:r>
-            <a:br/>
-            <a:r>
+            <a:br>
+              <a:rPr dirty="0"/>
+            </a:br>
+            <a:r>
+              <a:rPr dirty="0"/>
               <a:t>-- a docs skill shouldn't delete files!</a:t>
             </a:r>
           </a:p>
@@ -4397,7 +4447,7 @@
         </p:nvSpPr>
         <p:spPr>
           <a:xfrm>
-            <a:off x="6583680" y="5029200"/>
+            <a:off x="6648416" y="4728784"/>
             <a:ext cx="2286000" cy="365760"/>
           </a:xfrm>
           <a:prstGeom prst="roundRect">
@@ -4437,6 +4487,7 @@
               </a:defRPr>
             </a:pPr>
             <a:r>
+              <a:rPr dirty="0"/>
               <a:t>Sharing Skills</a:t>
             </a:r>
           </a:p>
@@ -4450,8 +4501,8 @@
         </p:nvSpPr>
         <p:spPr>
           <a:xfrm>
-            <a:off x="6583680" y="5486400"/>
-            <a:ext cx="5029200" cy="822960"/>
+            <a:off x="6614160" y="5140264"/>
+            <a:ext cx="2918258" cy="692497"/>
           </a:xfrm>
           <a:prstGeom prst="rect">
             <a:avLst/>
@@ -4473,14 +4524,29 @@
               </a:defRPr>
             </a:pPr>
             <a:r>
-              <a:t>Place in .claude/skills/ and</a:t>
-            </a:r>
-            <a:br/>
-            <a:r>
+              <a:rPr dirty="0"/>
+              <a:t>Place in .</a:t>
+            </a:r>
+            <a:r>
+              <a:rPr dirty="0" err="1"/>
+              <a:t>claude</a:t>
+            </a:r>
+            <a:r>
+              <a:rPr dirty="0"/>
+              <a:t>/skills/ and</a:t>
+            </a:r>
+            <a:br>
+              <a:rPr dirty="0"/>
+            </a:br>
+            <a:r>
+              <a:rPr dirty="0"/>
               <a:t>commit to Git. Entire team gets</a:t>
             </a:r>
-            <a:br/>
-            <a:r>
+            <a:br>
+              <a:rPr dirty="0"/>
+            </a:br>
+            <a:r>
+              <a:rPr dirty="0"/>
               <a:t>the same workflow!</a:t>
             </a:r>
           </a:p>
@@ -10156,7 +10222,7 @@
         </p:nvSpPr>
         <p:spPr>
           <a:xfrm>
-            <a:off x="2743200" y="3474720"/>
+            <a:off x="2743200" y="3523272"/>
             <a:ext cx="548640" cy="274320"/>
           </a:xfrm>
           <a:prstGeom prst="rightArrow">
@@ -10200,7 +10266,7 @@
         </p:nvSpPr>
         <p:spPr>
           <a:xfrm>
-            <a:off x="3383280" y="3291840"/>
+            <a:off x="3291840" y="3286985"/>
             <a:ext cx="2560320" cy="731520"/>
           </a:xfrm>
           <a:prstGeom prst="roundRect">
@@ -10240,10 +10306,14 @@
               </a:defRPr>
             </a:pPr>
             <a:r>
+              <a:rPr dirty="0"/>
               <a:t>Explore Subagent</a:t>
             </a:r>
-            <a:br/>
-            <a:r>
+            <a:br>
+              <a:rPr dirty="0"/>
+            </a:br>
+            <a:r>
+              <a:rPr dirty="0"/>
               <a:t>(separate fork)</a:t>
             </a:r>
           </a:p>
@@ -10257,7 +10327,7 @@
         </p:nvSpPr>
         <p:spPr>
           <a:xfrm>
-            <a:off x="5943600" y="3474720"/>
+            <a:off x="5852160" y="3515585"/>
             <a:ext cx="548640" cy="274320"/>
           </a:xfrm>
           <a:prstGeom prst="rightArrow">
@@ -10301,7 +10371,7 @@
         </p:nvSpPr>
         <p:spPr>
           <a:xfrm>
-            <a:off x="6583680" y="3291840"/>
+            <a:off x="6400800" y="3294672"/>
             <a:ext cx="2560320" cy="731520"/>
           </a:xfrm>
           <a:prstGeom prst="roundRect">
@@ -10341,10 +10411,14 @@
               </a:defRPr>
             </a:pPr>
             <a:r>
+              <a:rPr dirty="0"/>
               <a:t>Reads code, maps</a:t>
             </a:r>
-            <a:br/>
-            <a:r>
+            <a:br>
+              <a:rPr dirty="0"/>
+            </a:br>
+            <a:r>
+              <a:rPr dirty="0"/>
               <a:t>dependencies</a:t>
             </a:r>
           </a:p>
@@ -10358,7 +10432,7 @@
         </p:nvSpPr>
         <p:spPr>
           <a:xfrm>
-            <a:off x="9144000" y="3474720"/>
+            <a:off x="8961120" y="3515585"/>
             <a:ext cx="548640" cy="274320"/>
           </a:xfrm>
           <a:prstGeom prst="rightArrow">
@@ -10402,7 +10476,7 @@
         </p:nvSpPr>
         <p:spPr>
           <a:xfrm>
-            <a:off x="9784080" y="3291840"/>
+            <a:off x="9509760" y="3290221"/>
             <a:ext cx="2011680" cy="731520"/>
           </a:xfrm>
           <a:prstGeom prst="roundRect">
@@ -14675,7 +14749,7 @@
         <p:spPr>
           <a:xfrm>
             <a:off x="731520" y="4663440"/>
-            <a:ext cx="4754880" cy="1920240"/>
+            <a:ext cx="4754880" cy="2018501"/>
           </a:xfrm>
           <a:prstGeom prst="rect">
             <a:avLst/>
@@ -14700,6 +14774,7 @@
               </a:defRPr>
             </a:pPr>
             <a:r>
+              <a:rPr dirty="0"/>
               <a:t># Example TDD conversation:</a:t>
             </a:r>
           </a:p>
@@ -14715,7 +14790,7 @@
                 <a:latin typeface="Courier New"/>
               </a:defRPr>
             </a:pPr>
-            <a:endParaRPr/>
+            <a:endParaRPr dirty="0"/>
           </a:p>
           <a:p>
             <a:pPr>
@@ -14730,6 +14805,7 @@
               </a:defRPr>
             </a:pPr>
             <a:r>
+              <a:rPr dirty="0"/>
               <a:t>You: 'Here is a failing test for</a:t>
             </a:r>
           </a:p>
@@ -14746,7 +14822,16 @@
               </a:defRPr>
             </a:pPr>
             <a:r>
-              <a:t>the calculateDiscount function.</a:t>
+              <a:rPr dirty="0"/>
+              <a:t>the </a:t>
+            </a:r>
+            <a:r>
+              <a:rPr dirty="0" err="1"/>
+              <a:t>calculateDiscount</a:t>
+            </a:r>
+            <a:r>
+              <a:rPr dirty="0"/>
+              <a:t> function.</a:t>
             </a:r>
           </a:p>
           <a:p>
@@ -14762,6 +14847,7 @@
               </a:defRPr>
             </a:pPr>
             <a:r>
+              <a:rPr dirty="0"/>
               <a:t>Make it pass without changing</a:t>
             </a:r>
           </a:p>
@@ -14778,6 +14864,7 @@
               </a:defRPr>
             </a:pPr>
             <a:r>
+              <a:rPr dirty="0"/>
               <a:t>the test.'</a:t>
             </a:r>
           </a:p>
@@ -14788,12 +14875,15 @@
               </a:spcAft>
               <a:defRPr sz="1200" b="0">
                 <a:solidFill>
-                  <a:srgbClr val="FFFFFF"/>
+                  <a:srgbClr val="7F8C8D"/>
                 </a:solidFill>
                 <a:latin typeface="Courier New"/>
               </a:defRPr>
             </a:pPr>
-            <a:endParaRPr/>
+            <a:r>
+              <a:rPr dirty="0"/>
+              <a:t>Claude: *reads test, understands</a:t>
+            </a:r>
           </a:p>
           <a:p>
             <a:pPr>
@@ -14808,22 +14898,7 @@
               </a:defRPr>
             </a:pPr>
             <a:r>
-              <a:t>Claude: *reads test, understands</a:t>
-            </a:r>
-          </a:p>
-          <a:p>
-            <a:pPr>
-              <a:spcAft>
-                <a:spcPts val="480"/>
-              </a:spcAft>
-              <a:defRPr sz="1200" b="0">
-                <a:solidFill>
-                  <a:srgbClr val="7F8C8D"/>
-                </a:solidFill>
-                <a:latin typeface="Courier New"/>
-              </a:defRPr>
-            </a:pPr>
-            <a:r>
+              <a:rPr dirty="0"/>
               <a:t>expected behavior, writes code*</a:t>
             </a:r>
           </a:p>
@@ -15424,7 +15499,7 @@
         </p:nvSpPr>
         <p:spPr>
           <a:xfrm>
-            <a:off x="6583680" y="3291840"/>
+            <a:off x="6583680" y="3235196"/>
             <a:ext cx="2286000" cy="365760"/>
           </a:xfrm>
           <a:prstGeom prst="roundRect">
@@ -15464,6 +15539,7 @@
               </a:defRPr>
             </a:pPr>
             <a:r>
+              <a:rPr dirty="0"/>
               <a:t>Eliminates ambiguity</a:t>
             </a:r>
           </a:p>
@@ -15477,7 +15553,7 @@
         </p:nvSpPr>
         <p:spPr>
           <a:xfrm>
-            <a:off x="6583680" y="3749040"/>
+            <a:off x="6583680" y="3692396"/>
             <a:ext cx="5029200" cy="548640"/>
           </a:xfrm>
           <a:prstGeom prst="rect">
@@ -15500,10 +15576,14 @@
               </a:defRPr>
             </a:pPr>
             <a:r>
+              <a:rPr dirty="0"/>
               <a:t>Claude asks about edge cases</a:t>
             </a:r>
-            <a:br/>
-            <a:r>
+            <a:br>
+              <a:rPr dirty="0"/>
+            </a:br>
+            <a:r>
+              <a:rPr dirty="0"/>
               <a:t>you didn't think of upfront</a:t>
             </a:r>
           </a:p>
@@ -15517,7 +15597,7 @@
         </p:nvSpPr>
         <p:spPr>
           <a:xfrm>
-            <a:off x="6583680" y="4389120"/>
+            <a:off x="6583680" y="4203004"/>
             <a:ext cx="2286000" cy="365760"/>
           </a:xfrm>
           <a:prstGeom prst="roundRect">
@@ -15570,7 +15650,7 @@
         </p:nvSpPr>
         <p:spPr>
           <a:xfrm>
-            <a:off x="6583680" y="4846320"/>
+            <a:off x="6583680" y="4660204"/>
             <a:ext cx="5029200" cy="548640"/>
           </a:xfrm>
           <a:prstGeom prst="rect">
@@ -15610,7 +15690,7 @@
         </p:nvSpPr>
         <p:spPr>
           <a:xfrm>
-            <a:off x="6583680" y="5486400"/>
+            <a:off x="6583680" y="5227132"/>
             <a:ext cx="2286000" cy="365760"/>
           </a:xfrm>
           <a:prstGeom prst="roundRect">
@@ -15650,6 +15730,7 @@
               </a:defRPr>
             </a:pPr>
             <a:r>
+              <a:rPr dirty="0"/>
               <a:t>Better architecture</a:t>
             </a:r>
           </a:p>
@@ -15663,7 +15744,7 @@
         </p:nvSpPr>
         <p:spPr>
           <a:xfrm>
-            <a:off x="6583680" y="5943600"/>
+            <a:off x="6583680" y="5666044"/>
             <a:ext cx="5029200" cy="548640"/>
           </a:xfrm>
           <a:prstGeom prst="rect">
@@ -15686,10 +15767,14 @@
               </a:defRPr>
             </a:pPr>
             <a:r>
+              <a:rPr dirty="0"/>
               <a:t>Claude considers trade-offs</a:t>
             </a:r>
-            <a:br/>
-            <a:r>
+            <a:br>
+              <a:rPr dirty="0"/>
+            </a:br>
+            <a:r>
+              <a:rPr dirty="0"/>
               <a:t>BEFORE writing code</a:t>
             </a:r>
           </a:p>
@@ -17412,8 +17497,8 @@
         </p:nvSpPr>
         <p:spPr>
           <a:xfrm>
-            <a:off x="548640" y="2103120"/>
-            <a:ext cx="11064240" cy="3200400"/>
+            <a:off x="548640" y="2103119"/>
+            <a:ext cx="11094720" cy="3314963"/>
           </a:xfrm>
           <a:prstGeom prst="roundRect">
             <a:avLst/>
@@ -17457,7 +17542,7 @@
         <p:spPr>
           <a:xfrm>
             <a:off x="822960" y="2194560"/>
-            <a:ext cx="10515600" cy="3017520"/>
+            <a:ext cx="10515600" cy="4229363"/>
           </a:xfrm>
           <a:prstGeom prst="rect">
             <a:avLst/>
@@ -17482,8 +17567,22 @@
               </a:defRPr>
             </a:pPr>
             <a:r>
-              <a:t># .github/workflows/claude-review.yml</a:t>
-            </a:r>
+              <a:rPr sz="1100" dirty="0"/>
+              <a:t># .</a:t>
+            </a:r>
+            <a:r>
+              <a:rPr sz="1100" dirty="0" err="1"/>
+              <a:t>github</a:t>
+            </a:r>
+            <a:r>
+              <a:rPr sz="1100" dirty="0"/>
+              <a:t>/workflows/</a:t>
+            </a:r>
+            <a:r>
+              <a:rPr sz="1100" dirty="0" err="1"/>
+              <a:t>claude-review.yml</a:t>
+            </a:r>
+            <a:endParaRPr sz="1100" dirty="0"/>
           </a:p>
           <a:p>
             <a:pPr>
@@ -17498,6 +17597,7 @@
               </a:defRPr>
             </a:pPr>
             <a:r>
+              <a:rPr sz="1100" dirty="0"/>
               <a:t>name: Claude Code Review</a:t>
             </a:r>
           </a:p>
@@ -17514,7 +17614,16 @@
               </a:defRPr>
             </a:pPr>
             <a:r>
-              <a:t>on: [pull_request]</a:t>
+              <a:rPr sz="1100" dirty="0"/>
+              <a:t>on: [</a:t>
+            </a:r>
+            <a:r>
+              <a:rPr sz="1100" dirty="0" err="1"/>
+              <a:t>pull_request</a:t>
+            </a:r>
+            <a:r>
+              <a:rPr sz="1100" dirty="0"/>
+              <a:t>]</a:t>
             </a:r>
           </a:p>
           <a:p>
@@ -17530,6 +17639,7 @@
               </a:defRPr>
             </a:pPr>
             <a:r>
+              <a:rPr sz="1100" dirty="0"/>
               <a:t>jobs:</a:t>
             </a:r>
           </a:p>
@@ -17546,6 +17656,7 @@
               </a:defRPr>
             </a:pPr>
             <a:r>
+              <a:rPr sz="1100" dirty="0"/>
               <a:t>  review:</a:t>
             </a:r>
           </a:p>
@@ -17562,6 +17673,7 @@
               </a:defRPr>
             </a:pPr>
             <a:r>
+              <a:rPr sz="1100" dirty="0"/>
               <a:t>    runs-on: ubuntu-latest</a:t>
             </a:r>
           </a:p>
@@ -17578,6 +17690,7 @@
               </a:defRPr>
             </a:pPr>
             <a:r>
+              <a:rPr sz="1100" dirty="0"/>
               <a:t>    steps:</a:t>
             </a:r>
           </a:p>
@@ -17594,6 +17707,7 @@
               </a:defRPr>
             </a:pPr>
             <a:r>
+              <a:rPr sz="1100" dirty="0"/>
               <a:t>      - uses: actions/checkout@v4</a:t>
             </a:r>
           </a:p>
@@ -17610,6 +17724,7 @@
               </a:defRPr>
             </a:pPr>
             <a:r>
+              <a:rPr sz="1100" dirty="0"/>
               <a:t>      - name: Run Claude Review</a:t>
             </a:r>
           </a:p>
@@ -17626,6 +17741,7 @@
               </a:defRPr>
             </a:pPr>
             <a:r>
+              <a:rPr sz="1100" dirty="0"/>
               <a:t>        run: |</a:t>
             </a:r>
           </a:p>
@@ -17642,7 +17758,16 @@
               </a:defRPr>
             </a:pPr>
             <a:r>
-              <a:t>          claude -p "Review the changes in this PR.</a:t>
+              <a:rPr sz="1100" dirty="0"/>
+              <a:t>          </a:t>
+            </a:r>
+            <a:r>
+              <a:rPr sz="1100" dirty="0" err="1"/>
+              <a:t>claude</a:t>
+            </a:r>
+            <a:r>
+              <a:rPr sz="1100" dirty="0"/>
+              <a:t> -p "Review the changes in this PR.</a:t>
             </a:r>
           </a:p>
           <a:p>
@@ -17658,6 +17783,7 @@
               </a:defRPr>
             </a:pPr>
             <a:r>
+              <a:rPr sz="1100" dirty="0"/>
               <a:t>            Check for: security issues, performance problems,</a:t>
             </a:r>
           </a:p>
@@ -17674,6 +17800,7 @@
               </a:defRPr>
             </a:pPr>
             <a:r>
+              <a:rPr sz="1100" dirty="0"/>
               <a:t>            missing tests. Output a JSON report with severity</a:t>
             </a:r>
           </a:p>
@@ -17690,8 +17817,22 @@
               </a:defRPr>
             </a:pPr>
             <a:r>
-              <a:t>            levels." --output-format json &gt; review.json</a:t>
-            </a:r>
+              <a:rPr sz="1100" dirty="0"/>
+              <a:t>            levels." --output-format </a:t>
+            </a:r>
+            <a:r>
+              <a:rPr sz="1100" dirty="0" err="1"/>
+              <a:t>json</a:t>
+            </a:r>
+            <a:r>
+              <a:rPr sz="1100" dirty="0"/>
+              <a:t> &gt; </a:t>
+            </a:r>
+            <a:r>
+              <a:rPr sz="1100" dirty="0" err="1"/>
+              <a:t>review.json</a:t>
+            </a:r>
+            <a:endParaRPr sz="1100" dirty="0"/>
           </a:p>
           <a:p>
             <a:pPr>
@@ -17706,6 +17847,7 @@
               </a:defRPr>
             </a:pPr>
             <a:r>
+              <a:rPr sz="1100" dirty="0"/>
               <a:t>      - name: Check Results</a:t>
             </a:r>
           </a:p>
@@ -17722,6 +17864,7 @@
               </a:defRPr>
             </a:pPr>
             <a:r>
+              <a:rPr sz="1100" dirty="0"/>
               <a:t>        run: |</a:t>
             </a:r>
           </a:p>
@@ -17738,6 +17881,7 @@
               </a:defRPr>
             </a:pPr>
             <a:r>
+              <a:rPr sz="1100" dirty="0"/>
               <a:t>          # Parse JSON and fail if critical issues found</a:t>
             </a:r>
           </a:p>
@@ -17754,8 +17898,22 @@
               </a:defRPr>
             </a:pPr>
             <a:r>
-              <a:t>          python check_review.py review.json</a:t>
-            </a:r>
+              <a:rPr sz="1100" dirty="0"/>
+              <a:t>          python </a:t>
+            </a:r>
+            <a:r>
+              <a:rPr sz="1100" dirty="0" err="1"/>
+              <a:t>check_review.py</a:t>
+            </a:r>
+            <a:r>
+              <a:rPr sz="1100" dirty="0"/>
+              <a:t> </a:t>
+            </a:r>
+            <a:r>
+              <a:rPr sz="1100" dirty="0" err="1"/>
+              <a:t>review.json</a:t>
+            </a:r>
+            <a:endParaRPr sz="1100" dirty="0"/>
           </a:p>
         </p:txBody>
       </p:sp>
@@ -17767,8 +17925,8 @@
         </p:nvSpPr>
         <p:spPr>
           <a:xfrm>
-            <a:off x="548640" y="5486400"/>
-            <a:ext cx="11064240" cy="1188720"/>
+            <a:off x="548640" y="5486399"/>
+            <a:ext cx="11094720" cy="1303281"/>
           </a:xfrm>
           <a:prstGeom prst="roundRect">
             <a:avLst/>
@@ -18186,8 +18344,8 @@
         </p:nvSpPr>
         <p:spPr>
           <a:xfrm>
-            <a:off x="548640" y="2743200"/>
-            <a:ext cx="5303520" cy="3200400"/>
+            <a:off x="548640" y="2743199"/>
+            <a:ext cx="5301902" cy="3908453"/>
           </a:xfrm>
           <a:prstGeom prst="roundRect">
             <a:avLst/>
@@ -18256,6 +18414,7 @@
               </a:defRPr>
             </a:pPr>
             <a:r>
+              <a:rPr dirty="0"/>
               <a:t># Using Claude Code SDK</a:t>
             </a:r>
           </a:p>
@@ -18272,6 +18431,7 @@
               </a:defRPr>
             </a:pPr>
             <a:r>
+              <a:rPr dirty="0"/>
               <a:t>import subprocess</a:t>
             </a:r>
           </a:p>
@@ -18288,8 +18448,14 @@
               </a:defRPr>
             </a:pPr>
             <a:r>
-              <a:t>import json</a:t>
-            </a:r>
+              <a:rPr dirty="0"/>
+              <a:t>import </a:t>
+            </a:r>
+            <a:r>
+              <a:rPr dirty="0" err="1"/>
+              <a:t>json</a:t>
+            </a:r>
+            <a:endParaRPr dirty="0"/>
           </a:p>
           <a:p>
             <a:pPr>
@@ -18303,7 +18469,7 @@
                 <a:latin typeface="Courier New"/>
               </a:defRPr>
             </a:pPr>
-            <a:endParaRPr/>
+            <a:endParaRPr dirty="0"/>
           </a:p>
           <a:p>
             <a:pPr>
@@ -18318,7 +18484,16 @@
               </a:defRPr>
             </a:pPr>
             <a:r>
-              <a:t>result = subprocess.run(</a:t>
+              <a:rPr dirty="0"/>
+              <a:t>result = </a:t>
+            </a:r>
+            <a:r>
+              <a:rPr dirty="0" err="1"/>
+              <a:t>subprocess.run</a:t>
+            </a:r>
+            <a:r>
+              <a:rPr dirty="0"/>
+              <a:t>(</a:t>
             </a:r>
           </a:p>
           <a:p>
@@ -18334,7 +18509,16 @@
               </a:defRPr>
             </a:pPr>
             <a:r>
-              <a:t>  ["claude", "-p",</a:t>
+              <a:rPr dirty="0"/>
+              <a:t>  ["</a:t>
+            </a:r>
+            <a:r>
+              <a:rPr dirty="0" err="1"/>
+              <a:t>claude</a:t>
+            </a:r>
+            <a:r>
+              <a:rPr dirty="0"/>
+              <a:t>", "-p",</a:t>
             </a:r>
           </a:p>
           <a:p>
@@ -18350,6 +18534,7 @@
               </a:defRPr>
             </a:pPr>
             <a:r>
+              <a:rPr dirty="0"/>
               <a:t>   "Review this code",</a:t>
             </a:r>
           </a:p>
@@ -18366,7 +18551,16 @@
               </a:defRPr>
             </a:pPr>
             <a:r>
-              <a:t>   "--output-format", "json"],</a:t>
+              <a:rPr dirty="0"/>
+              <a:t>   "--output-format", "</a:t>
+            </a:r>
+            <a:r>
+              <a:rPr dirty="0" err="1"/>
+              <a:t>json</a:t>
+            </a:r>
+            <a:r>
+              <a:rPr dirty="0"/>
+              <a:t>"],</a:t>
             </a:r>
           </a:p>
           <a:p>
@@ -18382,7 +18576,16 @@
               </a:defRPr>
             </a:pPr>
             <a:r>
-              <a:t>  capture_output=True,</a:t>
+              <a:rPr dirty="0"/>
+              <a:t>  </a:t>
+            </a:r>
+            <a:r>
+              <a:rPr dirty="0" err="1"/>
+              <a:t>capture_output</a:t>
+            </a:r>
+            <a:r>
+              <a:rPr dirty="0"/>
+              <a:t>=True,</a:t>
             </a:r>
           </a:p>
           <a:p>
@@ -18398,6 +18601,7 @@
               </a:defRPr>
             </a:pPr>
             <a:r>
+              <a:rPr dirty="0"/>
               <a:t>  text=True</a:t>
             </a:r>
           </a:p>
@@ -18414,6 +18618,7 @@
               </a:defRPr>
             </a:pPr>
             <a:r>
+              <a:rPr dirty="0"/>
               <a:t>)</a:t>
             </a:r>
           </a:p>
@@ -18429,7 +18634,7 @@
                 <a:latin typeface="Courier New"/>
               </a:defRPr>
             </a:pPr>
-            <a:endParaRPr/>
+            <a:endParaRPr dirty="0"/>
           </a:p>
           <a:p>
             <a:pPr>
@@ -18444,7 +18649,24 @@
               </a:defRPr>
             </a:pPr>
             <a:r>
-              <a:t>review = json.loads(result.stdout)</a:t>
+              <a:rPr dirty="0"/>
+              <a:t>review = </a:t>
+            </a:r>
+            <a:r>
+              <a:rPr dirty="0" err="1"/>
+              <a:t>json.loads</a:t>
+            </a:r>
+            <a:r>
+              <a:rPr dirty="0"/>
+              <a:t>(</a:t>
+            </a:r>
+            <a:r>
+              <a:rPr dirty="0" err="1"/>
+              <a:t>result.stdout</a:t>
+            </a:r>
+            <a:r>
+              <a:rPr dirty="0"/>
+              <a:t>)</a:t>
             </a:r>
           </a:p>
           <a:p>
@@ -18460,7 +18682,24 @@
               </a:defRPr>
             </a:pPr>
             <a:r>
-              <a:t>if review.get('critical_issues'):</a:t>
+              <a:rPr dirty="0"/>
+              <a:t>if </a:t>
+            </a:r>
+            <a:r>
+              <a:rPr dirty="0" err="1"/>
+              <a:t>review.get</a:t>
+            </a:r>
+            <a:r>
+              <a:rPr dirty="0"/>
+              <a:t>('</a:t>
+            </a:r>
+            <a:r>
+              <a:rPr dirty="0" err="1"/>
+              <a:t>critical_issues</a:t>
+            </a:r>
+            <a:r>
+              <a:rPr dirty="0"/>
+              <a:t>'):</a:t>
             </a:r>
           </a:p>
           <a:p>
@@ -18476,7 +18715,16 @@
               </a:defRPr>
             </a:pPr>
             <a:r>
-              <a:t>    sys.exit(1)  # Fail the build</a:t>
+              <a:rPr dirty="0"/>
+              <a:t>    </a:t>
+            </a:r>
+            <a:r>
+              <a:rPr dirty="0" err="1"/>
+              <a:t>sys.exit</a:t>
+            </a:r>
+            <a:r>
+              <a:rPr dirty="0"/>
+              <a:t>(1)  # Fail the build</a:t>
             </a:r>
           </a:p>
         </p:txBody>
